--- a/presentacion-proyecto.pptx
+++ b/presentacion-proyecto.pptx
@@ -11214,7 +11214,7 @@
         <p:spPr>
           <a:xfrm>
             <a:off x="731520" y="685800"/>
-            <a:ext cx="10698480" cy="365760"/>
+            <a:ext cx="10698600" cy="292500"/>
           </a:xfrm>
           <a:prstGeom prst="rect">
             <a:avLst/>
@@ -11242,7 +11242,7 @@
             <a:r>
               <a:rPr b="1" i="0" lang="en-US" sz="1300" u="none" cap="none" strike="noStrike">
                 <a:solidFill>
-                  <a:srgbClr val="5EE7DF"/>
+                  <a:schemeClr val="lt1"/>
                 </a:solidFill>
                 <a:latin typeface="Arial"/>
                 <a:ea typeface="Arial"/>
@@ -11251,7 +11251,11 @@
               </a:rPr>
               <a:t>INFORMÁTICA Y CONVERGENCIA TECNOLÓGICA</a:t>
             </a:r>
-            <a:endParaRPr/>
+            <a:endParaRPr>
+              <a:solidFill>
+                <a:schemeClr val="lt1"/>
+              </a:solidFill>
+            </a:endParaRPr>
           </a:p>
         </p:txBody>
       </p:sp>
@@ -11264,7 +11268,7 @@
         <p:spPr>
           <a:xfrm>
             <a:off x="914400" y="1508760"/>
-            <a:ext cx="10332720" cy="1554480"/>
+            <a:ext cx="10332600" cy="923400"/>
           </a:xfrm>
           <a:prstGeom prst="rect">
             <a:avLst/>
@@ -11292,7 +11296,7 @@
             <a:r>
               <a:rPr b="1" i="0" lang="en-US" sz="3600" u="none" cap="none" strike="noStrike">
                 <a:solidFill>
-                  <a:srgbClr val="E8EEF7"/>
+                  <a:schemeClr val="lt1"/>
                 </a:solidFill>
                 <a:latin typeface="Arial"/>
                 <a:ea typeface="Arial"/>
@@ -11304,7 +11308,7 @@
             <a:br>
               <a:rPr b="0" i="0" lang="en-US" sz="1800" u="none" cap="none" strike="noStrike">
                 <a:solidFill>
-                  <a:schemeClr val="dk1"/>
+                  <a:schemeClr val="lt1"/>
                 </a:solidFill>
                 <a:latin typeface="Calibri"/>
                 <a:ea typeface="Calibri"/>
@@ -11315,7 +11319,7 @@
             <a:r>
               <a:rPr b="0" i="0" lang="en-US" sz="1800" u="none" cap="none" strike="noStrike">
                 <a:solidFill>
-                  <a:schemeClr val="dk1"/>
+                  <a:schemeClr val="lt1"/>
                 </a:solidFill>
                 <a:latin typeface="Calibri"/>
                 <a:ea typeface="Calibri"/>
@@ -11324,7 +11328,11 @@
               </a:rPr>
               <a:t>en la era digital</a:t>
             </a:r>
-            <a:endParaRPr/>
+            <a:endParaRPr>
+              <a:solidFill>
+                <a:schemeClr val="lt1"/>
+              </a:solidFill>
+            </a:endParaRPr>
           </a:p>
         </p:txBody>
       </p:sp>
@@ -11337,7 +11345,7 @@
         <p:spPr>
           <a:xfrm>
             <a:off x="1828800" y="3383280"/>
-            <a:ext cx="8503920" cy="822960"/>
+            <a:ext cx="8503800" cy="677100"/>
           </a:xfrm>
           <a:prstGeom prst="rect">
             <a:avLst/>
@@ -11365,7 +11373,7 @@
             <a:r>
               <a:rPr b="0" i="0" lang="en-US" sz="1900" u="none" cap="none" strike="noStrike">
                 <a:solidFill>
-                  <a:srgbClr val="A9B7CA"/>
+                  <a:schemeClr val="lt1"/>
                 </a:solidFill>
                 <a:latin typeface="Arial"/>
                 <a:ea typeface="Arial"/>
@@ -11374,7 +11382,11 @@
               </a:rPr>
               <a:t>Tecnología, comunicación y violencia política en los nuevos espacios de participación</a:t>
             </a:r>
-            <a:endParaRPr/>
+            <a:endParaRPr>
+              <a:solidFill>
+                <a:schemeClr val="lt1"/>
+              </a:solidFill>
+            </a:endParaRPr>
           </a:p>
         </p:txBody>
       </p:sp>
@@ -11387,7 +11399,7 @@
         <p:spPr>
           <a:xfrm>
             <a:off x="1828800" y="4892040"/>
-            <a:ext cx="8503920" cy="640080"/>
+            <a:ext cx="8503800" cy="615600"/>
           </a:xfrm>
           <a:prstGeom prst="rect">
             <a:avLst/>
@@ -11415,7 +11427,7 @@
             <a:r>
               <a:rPr b="1" i="0" lang="en-US" sz="1600" u="none" cap="none" strike="noStrike">
                 <a:solidFill>
-                  <a:srgbClr val="FFC36B"/>
+                  <a:schemeClr val="lt1"/>
                 </a:solidFill>
                 <a:latin typeface="Arial"/>
                 <a:ea typeface="Arial"/>
@@ -11427,7 +11439,7 @@
             <a:br>
               <a:rPr b="0" i="0" lang="en-US" sz="1800" u="none" cap="none" strike="noStrike">
                 <a:solidFill>
-                  <a:schemeClr val="dk1"/>
+                  <a:schemeClr val="lt1"/>
                 </a:solidFill>
                 <a:latin typeface="Calibri"/>
                 <a:ea typeface="Calibri"/>
@@ -11438,7 +11450,7 @@
             <a:r>
               <a:rPr b="0" i="0" lang="en-US" sz="1800" u="none" cap="none" strike="noStrike">
                 <a:solidFill>
-                  <a:schemeClr val="dk1"/>
+                  <a:schemeClr val="lt1"/>
                 </a:solidFill>
                 <a:latin typeface="Calibri"/>
                 <a:ea typeface="Calibri"/>
@@ -11447,7 +11459,11 @@
               </a:rPr>
               <a:t>Administración Pública · CUN · 2026</a:t>
             </a:r>
-            <a:endParaRPr/>
+            <a:endParaRPr>
+              <a:solidFill>
+                <a:schemeClr val="lt1"/>
+              </a:solidFill>
+            </a:endParaRPr>
           </a:p>
         </p:txBody>
       </p:sp>
